--- a/m6/diapositivos/sessao-04-m6-f06.pptx
+++ b/m6/diapositivos/sessao-04-m6-f06.pptx
@@ -869,7 +869,7 @@
                 <a:ea typeface="Arial" pitchFamily="34" charset="-122"/>
                 <a:cs typeface="Arial" pitchFamily="34" charset="-120"/>
               </a:rPr>
-              <a:t>Lição M6-F06, Ave-Marias</a:t>
+              <a:t>Lição M6-F06, «Ave-Marias»</a:t>
             </a:r>
             <a:endParaRPr lang="en-US" sz="1000" dirty="0"/>
           </a:p>
@@ -1027,7 +1027,7 @@
                 <a:ea typeface="Arial" pitchFamily="34" charset="-122"/>
                 <a:cs typeface="Arial" pitchFamily="34" charset="-120"/>
               </a:rPr>
-              <a:t>Ave-Marias</a:t>
+              <a:t>«Ave-Marias»</a:t>
             </a:r>
             <a:endParaRPr lang="en-US" sz="4000" dirty="0"/>
           </a:p>
@@ -1397,7 +1397,7 @@
                 <a:ea typeface="Arial" pitchFamily="34" charset="-122"/>
                 <a:cs typeface="Arial" pitchFamily="34" charset="-120"/>
               </a:rPr>
-              <a:t>Lição M6-F06, Ave-Marias</a:t>
+              <a:t>Lição M6-F06, «Ave-Marias»</a:t>
             </a:r>
             <a:endParaRPr lang="en-US" sz="1000" dirty="0"/>
           </a:p>
@@ -2020,7 +2020,7 @@
                 <a:ea typeface="Arial" pitchFamily="34" charset="-122"/>
                 <a:cs typeface="Arial" pitchFamily="34" charset="-120"/>
               </a:rPr>
-              <a:t>Lição M6-F06, Ave-Marias</a:t>
+              <a:t>Lição M6-F06, «Ave-Marias»</a:t>
             </a:r>
             <a:endParaRPr lang="en-US" sz="1000" dirty="0"/>
           </a:p>
@@ -2733,7 +2733,7 @@
                 <a:ea typeface="Arial" pitchFamily="34" charset="-122"/>
                 <a:cs typeface="Arial" pitchFamily="34" charset="-120"/>
               </a:rPr>
-              <a:t>Lição M6-F06, Ave-Marias</a:t>
+              <a:t>Lição M6-F06, «Ave-Marias»</a:t>
             </a:r>
             <a:endParaRPr lang="en-US" sz="1000" dirty="0"/>
           </a:p>
@@ -3012,7 +3012,7 @@
                 <a:ea typeface="Arial" pitchFamily="34" charset="-122"/>
                 <a:cs typeface="Arial" pitchFamily="34" charset="-120"/>
               </a:rPr>
-              <a:t>Lição M6-F06, Ave-Marias</a:t>
+              <a:t>Lição M6-F06, «Ave-Marias»</a:t>
             </a:r>
             <a:endParaRPr lang="en-US" sz="1000" dirty="0"/>
           </a:p>
@@ -3382,7 +3382,35 @@
                 <a:ea typeface="Arial" pitchFamily="34" charset="-122"/>
                 <a:cs typeface="Arial" pitchFamily="34" charset="-120"/>
               </a:rPr>
-              <a:t>Cesário Verde, «O Sentimento dum Ocidental», O Livro de Cesário Verde (1887), grafia da edição.</a:t>
+              <a:t>Cesário Verde, «O Sentimento dum Ocidental», </a:t>
+            </a:r>
+            <a:pPr indent="0" marL="0">
+              <a:buNone/>
+            </a:pPr>
+            <a:r>
+              <a:rPr lang="en-US" sz="1200" i="1" dirty="0">
+                <a:solidFill>
+                  <a:srgbClr val="A9A79F"/>
+                </a:solidFill>
+                <a:latin typeface="Arial" pitchFamily="34" charset="0"/>
+                <a:ea typeface="Arial" pitchFamily="34" charset="-122"/>
+                <a:cs typeface="Arial" pitchFamily="34" charset="-120"/>
+              </a:rPr>
+              <a:t>O Livro de Cesário Verde</a:t>
+            </a:r>
+            <a:pPr indent="0" marL="0">
+              <a:buNone/>
+            </a:pPr>
+            <a:r>
+              <a:rPr lang="en-US" sz="1200" dirty="0">
+                <a:solidFill>
+                  <a:srgbClr val="A9A79F"/>
+                </a:solidFill>
+                <a:latin typeface="Arial" pitchFamily="34" charset="0"/>
+                <a:ea typeface="Arial" pitchFamily="34" charset="-122"/>
+                <a:cs typeface="Arial" pitchFamily="34" charset="-120"/>
+              </a:rPr>
+              <a:t> (1887), grafia da edição.</a:t>
             </a:r>
             <a:endParaRPr lang="en-US" sz="1200" dirty="0"/>
           </a:p>
@@ -3492,7 +3520,7 @@
                 <a:ea typeface="Arial" pitchFamily="34" charset="-122"/>
                 <a:cs typeface="Arial" pitchFamily="34" charset="-120"/>
               </a:rPr>
-              <a:t>Lição M6-F06, Ave-Marias</a:t>
+              <a:t>Lição M6-F06, «Ave-Marias»</a:t>
             </a:r>
             <a:endParaRPr lang="en-US" sz="1000" dirty="0"/>
           </a:p>
@@ -3882,7 +3910,35 @@
                 <a:ea typeface="Arial" pitchFamily="34" charset="-122"/>
                 <a:cs typeface="Arial" pitchFamily="34" charset="-120"/>
               </a:rPr>
-              <a:t>Cesário Verde, «O Sentimento dum Ocidental», O Livro de Cesário Verde (1887), grafia da edição.</a:t>
+              <a:t>Cesário Verde, «O Sentimento dum Ocidental», </a:t>
+            </a:r>
+            <a:pPr indent="0" marL="0">
+              <a:buNone/>
+            </a:pPr>
+            <a:r>
+              <a:rPr lang="en-US" sz="1200" i="1" dirty="0">
+                <a:solidFill>
+                  <a:srgbClr val="A9A79F"/>
+                </a:solidFill>
+                <a:latin typeface="Arial" pitchFamily="34" charset="0"/>
+                <a:ea typeface="Arial" pitchFamily="34" charset="-122"/>
+                <a:cs typeface="Arial" pitchFamily="34" charset="-120"/>
+              </a:rPr>
+              <a:t>O Livro de Cesário Verde</a:t>
+            </a:r>
+            <a:pPr indent="0" marL="0">
+              <a:buNone/>
+            </a:pPr>
+            <a:r>
+              <a:rPr lang="en-US" sz="1200" dirty="0">
+                <a:solidFill>
+                  <a:srgbClr val="A9A79F"/>
+                </a:solidFill>
+                <a:latin typeface="Arial" pitchFamily="34" charset="0"/>
+                <a:ea typeface="Arial" pitchFamily="34" charset="-122"/>
+                <a:cs typeface="Arial" pitchFamily="34" charset="-120"/>
+              </a:rPr>
+              <a:t> (1887), grafia da edição.</a:t>
             </a:r>
             <a:endParaRPr lang="en-US" sz="1200" dirty="0"/>
           </a:p>
@@ -3992,7 +4048,7 @@
                 <a:ea typeface="Arial" pitchFamily="34" charset="-122"/>
                 <a:cs typeface="Arial" pitchFamily="34" charset="-120"/>
               </a:rPr>
-              <a:t>Lição M6-F06, Ave-Marias</a:t>
+              <a:t>Lição M6-F06, «Ave-Marias»</a:t>
             </a:r>
             <a:endParaRPr lang="en-US" sz="1000" dirty="0"/>
           </a:p>
@@ -4615,7 +4671,7 @@
                 <a:ea typeface="Arial" pitchFamily="34" charset="-122"/>
                 <a:cs typeface="Arial" pitchFamily="34" charset="-120"/>
               </a:rPr>
-              <a:t>Lição M6-F06, Ave-Marias</a:t>
+              <a:t>Lição M6-F06, «Ave-Marias»</a:t>
             </a:r>
             <a:endParaRPr lang="en-US" sz="1000" dirty="0"/>
           </a:p>
@@ -5682,7 +5738,7 @@
                 <a:ea typeface="Arial" pitchFamily="34" charset="-122"/>
                 <a:cs typeface="Arial" pitchFamily="34" charset="-120"/>
               </a:rPr>
-              <a:t>Lição M6-F06, Ave-Marias</a:t>
+              <a:t>Lição M6-F06, «Ave-Marias»</a:t>
             </a:r>
             <a:endParaRPr lang="en-US" sz="1000" dirty="0"/>
           </a:p>
@@ -5884,7 +5940,7 @@
               <a:buNone/>
             </a:pPr>
             <a:r>
-              <a:rPr lang="en-US" sz="2300" dirty="0">
+              <a:rPr lang="en-US" sz="2300" b="1" dirty="0">
                 <a:solidFill>
                   <a:srgbClr val="F2F0EA"/>
                 </a:solidFill>
@@ -5892,7 +5948,160 @@
                 <a:ea typeface="Georgia" pitchFamily="34" charset="-122"/>
                 <a:cs typeface="Georgia" pitchFamily="34" charset="-120"/>
               </a:rPr>
-              <a:t>Cesário Verde (Lisboa, 1855–1886), precursor da poesia do século XX. O poema tem quatro partes, do anoitecer à madrugada: Ave-Marias, Noite Fechada, Ao Gás, Horas Mortas; passa pela zona ribeirinha, perto da EPI. A vida dele está na lição «Quem conta a vida de um poeta».</a:t>
+              <a:t>Cesário Verde</a:t>
+            </a:r>
+            <a:pPr indent="0" marL="0">
+              <a:lnSpc>
+                <a:spcPct val="120000"/>
+              </a:lnSpc>
+              <a:buNone/>
+            </a:pPr>
+            <a:r>
+              <a:rPr lang="en-US" sz="2300" dirty="0">
+                <a:solidFill>
+                  <a:srgbClr val="F2F0EA"/>
+                </a:solidFill>
+                <a:latin typeface="Georgia" pitchFamily="34" charset="0"/>
+                <a:ea typeface="Georgia" pitchFamily="34" charset="-122"/>
+                <a:cs typeface="Georgia" pitchFamily="34" charset="-120"/>
+              </a:rPr>
+              <a:t> (Lisboa, 1855–1886), precursor da poesia do século XX. O poema tem quatro partes, do anoitecer à madrugada: </a:t>
+            </a:r>
+            <a:pPr indent="0" marL="0">
+              <a:lnSpc>
+                <a:spcPct val="120000"/>
+              </a:lnSpc>
+              <a:buNone/>
+            </a:pPr>
+            <a:r>
+              <a:rPr lang="en-US" sz="2300" b="1" dirty="0">
+                <a:solidFill>
+                  <a:srgbClr val="F2F0EA"/>
+                </a:solidFill>
+                <a:latin typeface="Georgia" pitchFamily="34" charset="0"/>
+                <a:ea typeface="Georgia" pitchFamily="34" charset="-122"/>
+                <a:cs typeface="Georgia" pitchFamily="34" charset="-120"/>
+              </a:rPr>
+              <a:t>«Ave-Marias»</a:t>
+            </a:r>
+            <a:pPr indent="0" marL="0">
+              <a:lnSpc>
+                <a:spcPct val="120000"/>
+              </a:lnSpc>
+              <a:buNone/>
+            </a:pPr>
+            <a:r>
+              <a:rPr lang="en-US" sz="2300" dirty="0">
+                <a:solidFill>
+                  <a:srgbClr val="F2F0EA"/>
+                </a:solidFill>
+                <a:latin typeface="Georgia" pitchFamily="34" charset="0"/>
+                <a:ea typeface="Georgia" pitchFamily="34" charset="-122"/>
+                <a:cs typeface="Georgia" pitchFamily="34" charset="-120"/>
+              </a:rPr>
+              <a:t>, </a:t>
+            </a:r>
+            <a:pPr indent="0" marL="0">
+              <a:lnSpc>
+                <a:spcPct val="120000"/>
+              </a:lnSpc>
+              <a:buNone/>
+            </a:pPr>
+            <a:r>
+              <a:rPr lang="en-US" sz="2300" b="1" dirty="0">
+                <a:solidFill>
+                  <a:srgbClr val="F2F0EA"/>
+                </a:solidFill>
+                <a:latin typeface="Georgia" pitchFamily="34" charset="0"/>
+                <a:ea typeface="Georgia" pitchFamily="34" charset="-122"/>
+                <a:cs typeface="Georgia" pitchFamily="34" charset="-120"/>
+              </a:rPr>
+              <a:t>«Noite Fechada»</a:t>
+            </a:r>
+            <a:pPr indent="0" marL="0">
+              <a:lnSpc>
+                <a:spcPct val="120000"/>
+              </a:lnSpc>
+              <a:buNone/>
+            </a:pPr>
+            <a:r>
+              <a:rPr lang="en-US" sz="2300" dirty="0">
+                <a:solidFill>
+                  <a:srgbClr val="F2F0EA"/>
+                </a:solidFill>
+                <a:latin typeface="Georgia" pitchFamily="34" charset="0"/>
+                <a:ea typeface="Georgia" pitchFamily="34" charset="-122"/>
+                <a:cs typeface="Georgia" pitchFamily="34" charset="-120"/>
+              </a:rPr>
+              <a:t>, </a:t>
+            </a:r>
+            <a:pPr indent="0" marL="0">
+              <a:lnSpc>
+                <a:spcPct val="120000"/>
+              </a:lnSpc>
+              <a:buNone/>
+            </a:pPr>
+            <a:r>
+              <a:rPr lang="en-US" sz="2300" b="1" dirty="0">
+                <a:solidFill>
+                  <a:srgbClr val="F2F0EA"/>
+                </a:solidFill>
+                <a:latin typeface="Georgia" pitchFamily="34" charset="0"/>
+                <a:ea typeface="Georgia" pitchFamily="34" charset="-122"/>
+                <a:cs typeface="Georgia" pitchFamily="34" charset="-120"/>
+              </a:rPr>
+              <a:t>«Ao Gás»</a:t>
+            </a:r>
+            <a:pPr indent="0" marL="0">
+              <a:lnSpc>
+                <a:spcPct val="120000"/>
+              </a:lnSpc>
+              <a:buNone/>
+            </a:pPr>
+            <a:r>
+              <a:rPr lang="en-US" sz="2300" dirty="0">
+                <a:solidFill>
+                  <a:srgbClr val="F2F0EA"/>
+                </a:solidFill>
+                <a:latin typeface="Georgia" pitchFamily="34" charset="0"/>
+                <a:ea typeface="Georgia" pitchFamily="34" charset="-122"/>
+                <a:cs typeface="Georgia" pitchFamily="34" charset="-120"/>
+              </a:rPr>
+              <a:t>, </a:t>
+            </a:r>
+            <a:pPr indent="0" marL="0">
+              <a:lnSpc>
+                <a:spcPct val="120000"/>
+              </a:lnSpc>
+              <a:buNone/>
+            </a:pPr>
+            <a:r>
+              <a:rPr lang="en-US" sz="2300" b="1" dirty="0">
+                <a:solidFill>
+                  <a:srgbClr val="F2F0EA"/>
+                </a:solidFill>
+                <a:latin typeface="Georgia" pitchFamily="34" charset="0"/>
+                <a:ea typeface="Georgia" pitchFamily="34" charset="-122"/>
+                <a:cs typeface="Georgia" pitchFamily="34" charset="-120"/>
+              </a:rPr>
+              <a:t>«Horas Mortas»</a:t>
+            </a:r>
+            <a:pPr indent="0" marL="0">
+              <a:lnSpc>
+                <a:spcPct val="120000"/>
+              </a:lnSpc>
+              <a:buNone/>
+            </a:pPr>
+            <a:r>
+              <a:rPr lang="en-US" sz="2300" dirty="0">
+                <a:solidFill>
+                  <a:srgbClr val="F2F0EA"/>
+                </a:solidFill>
+                <a:latin typeface="Georgia" pitchFamily="34" charset="0"/>
+                <a:ea typeface="Georgia" pitchFamily="34" charset="-122"/>
+                <a:cs typeface="Georgia" pitchFamily="34" charset="-120"/>
+              </a:rPr>
+              <a:t>; passa pela zona ribeirinha, perto da EPI. A vida dele está na lição «Quem conta a vida de um poeta».</a:t>
             </a:r>
             <a:endParaRPr lang="en-US" sz="2300" dirty="0"/>
           </a:p>
@@ -6002,7 +6211,7 @@
                 <a:ea typeface="Arial" pitchFamily="34" charset="-122"/>
                 <a:cs typeface="Arial" pitchFamily="34" charset="-120"/>
               </a:rPr>
-              <a:t>Lição M6-F06, Ave-Marias</a:t>
+              <a:t>Lição M6-F06, «Ave-Marias»</a:t>
             </a:r>
             <a:endParaRPr lang="en-US" sz="1000" dirty="0"/>
           </a:p>
@@ -6715,7 +6924,7 @@
                 <a:ea typeface="Arial" pitchFamily="34" charset="-122"/>
                 <a:cs typeface="Arial" pitchFamily="34" charset="-120"/>
               </a:rPr>
-              <a:t>Lição M6-F06, Ave-Marias</a:t>
+              <a:t>Lição M6-F06, «Ave-Marias»</a:t>
             </a:r>
             <a:endParaRPr lang="en-US" sz="1000" dirty="0"/>
           </a:p>
